--- a/artifacts/프로젝트1_최종발표자료.pptx
+++ b/artifacts/프로젝트1_최종발표자료.pptx
@@ -1,6 +1,6 @@
 
 <file path=ppt/presentation.xml><?xml version="1.0" encoding="utf-8"?>
-<p:presentation xmlns:a="http://schemas.openxmlformats.org/drawingml/2006/main" xmlns:r="http://schemas.openxmlformats.org/officeDocument/2006/relationships" xmlns:p="http://schemas.openxmlformats.org/presentationml/2006/main">
+<p:presentation xmlns:p15="http://schemas.microsoft.com/office/powerpoint/2012/main" xmlns:a="http://schemas.openxmlformats.org/drawingml/2006/main" xmlns:r="http://schemas.openxmlformats.org/officeDocument/2006/relationships" xmlns:p="http://schemas.openxmlformats.org/presentationml/2006/main">
   <p:sldMasterIdLst>
     <p:sldMasterId id="2147483648" r:id="rId1"/>
   </p:sldMasterIdLst>
@@ -8,6 +8,8 @@
     <p:notesMasterId r:id="rId18"/>
   </p:notesMasterIdLst>
   <p:sldIdLst>
+    <p:sldId id="273" r:id="Rd8c6601cad174d80"/>
+    <p:sldId id="274" r:id="R0eb8d2d4339d4f63"/>
     <p:sldId id="256" r:id="rId2"/>
     <p:sldId id="257" r:id="rId3"/>
     <p:sldId id="258" r:id="rId4"/>
@@ -131,7 +133,7 @@
 </file>
 
 <file path=ppt/charts/chart1.xml><?xml version="1.0" encoding="utf-8"?>
-<c:chartSpace xmlns:c="http://schemas.openxmlformats.org/drawingml/2006/chart" xmlns:a="http://schemas.openxmlformats.org/drawingml/2006/main" xmlns:r="http://schemas.openxmlformats.org/officeDocument/2006/relationships" xmlns:c16r2="http://schemas.microsoft.com/office/drawing/2015/06/chart">
+<c:chartSpace xmlns:c15="http://schemas.microsoft.com/office/drawing/2012/chart" xmlns:c16="http://schemas.microsoft.com/office/drawing/2014/chart" xmlns:c="http://schemas.openxmlformats.org/drawingml/2006/chart" xmlns:a="http://schemas.openxmlformats.org/drawingml/2006/main" xmlns:r="http://schemas.openxmlformats.org/officeDocument/2006/relationships" xmlns:c16r2="http://schemas.microsoft.com/office/drawing/2015/06/chart">
   <c:date1904 val="0"/>
   <c:lang val="ko-KR"/>
   <c:roundedCorners val="1"/>
@@ -487,7 +489,7 @@
 </file>
 
 <file path=ppt/charts/chart2.xml><?xml version="1.0" encoding="utf-8"?>
-<c:chartSpace xmlns:c="http://schemas.openxmlformats.org/drawingml/2006/chart" xmlns:a="http://schemas.openxmlformats.org/drawingml/2006/main" xmlns:r="http://schemas.openxmlformats.org/officeDocument/2006/relationships" xmlns:c16r2="http://schemas.microsoft.com/office/drawing/2015/06/chart">
+<c:chartSpace xmlns:c15="http://schemas.microsoft.com/office/drawing/2012/chart" xmlns:c16="http://schemas.microsoft.com/office/drawing/2014/chart" xmlns:c="http://schemas.openxmlformats.org/drawingml/2006/chart" xmlns:a="http://schemas.openxmlformats.org/drawingml/2006/main" xmlns:r="http://schemas.openxmlformats.org/officeDocument/2006/relationships" xmlns:c16r2="http://schemas.microsoft.com/office/drawing/2015/06/chart">
   <c:date1904 val="0"/>
   <c:lang val="ko-KR"/>
   <c:roundedCorners val="1"/>
@@ -710,7 +712,7 @@
 </file>
 
 <file path=ppt/charts/chart3.xml><?xml version="1.0" encoding="utf-8"?>
-<c:chartSpace xmlns:c="http://schemas.openxmlformats.org/drawingml/2006/chart" xmlns:a="http://schemas.openxmlformats.org/drawingml/2006/main" xmlns:r="http://schemas.openxmlformats.org/officeDocument/2006/relationships" xmlns:c16r2="http://schemas.microsoft.com/office/drawing/2015/06/chart">
+<c:chartSpace xmlns:c15="http://schemas.microsoft.com/office/drawing/2012/chart" xmlns:c16="http://schemas.microsoft.com/office/drawing/2014/chart" xmlns:c="http://schemas.openxmlformats.org/drawingml/2006/chart" xmlns:a="http://schemas.openxmlformats.org/drawingml/2006/main" xmlns:r="http://schemas.openxmlformats.org/officeDocument/2006/relationships" xmlns:c16r2="http://schemas.microsoft.com/office/drawing/2015/06/chart">
   <c:date1904 val="0"/>
   <c:lang val="ko-KR"/>
   <c:roundedCorners val="1"/>
@@ -978,7 +980,7 @@
 </file>
 
 <file path=ppt/charts/chart4.xml><?xml version="1.0" encoding="utf-8"?>
-<c:chartSpace xmlns:c="http://schemas.openxmlformats.org/drawingml/2006/chart" xmlns:a="http://schemas.openxmlformats.org/drawingml/2006/main" xmlns:r="http://schemas.openxmlformats.org/officeDocument/2006/relationships" xmlns:c16r2="http://schemas.microsoft.com/office/drawing/2015/06/chart">
+<c:chartSpace xmlns:c15="http://schemas.microsoft.com/office/drawing/2012/chart" xmlns:c16="http://schemas.microsoft.com/office/drawing/2014/chart" xmlns:c="http://schemas.openxmlformats.org/drawingml/2006/chart" xmlns:a="http://schemas.openxmlformats.org/drawingml/2006/main" xmlns:r="http://schemas.openxmlformats.org/officeDocument/2006/relationships" xmlns:c16r2="http://schemas.microsoft.com/office/drawing/2015/06/chart">
   <c:date1904 val="0"/>
   <c:lang val="ko-KR"/>
   <c:roundedCorners val="1"/>
@@ -2063,6 +2065,116 @@
   </p:cSld>
   <p:clrMapOvr>
     <a:masterClrMapping/>
+  </p:clrMapOvr>
+</p:notes>
+</file>
+
+<file path=ppt/notesSlides/notesSlide17.xml><?xml version="1.0" encoding="utf-8"?>
+<p:notes xmlns:a="http://schemas.openxmlformats.org/drawingml/2006/main" xmlns:p="http://schemas.openxmlformats.org/presentationml/2006/main">
+  <p:cSld>
+    <p:spTree>
+      <p:nvGrpSpPr>
+        <p:cNvPr id="1" name=""/>
+        <p:cNvGrpSpPr/>
+        <p:nvPr/>
+      </p:nvGrpSpPr>
+      <p:grpSpPr>
+        <a:xfrm xmlns:a="http://schemas.openxmlformats.org/drawingml/2006/main"/>
+      </p:grpSpPr>
+      <p:sp>
+        <p:nvSpPr>
+          <p:cNvPr id="2" name="Slide Image Placeholder 1"/>
+          <p:cNvSpPr/>
+          <p:nvPr>
+            <p:ph type="sldImg" idx="0"/>
+          </p:nvPr>
+        </p:nvSpPr>
+        <p:spPr/>
+        <p:txBody>
+          <a:bodyPr xmlns:a="http://schemas.openxmlformats.org/drawingml/2006/main"/>
+          <a:lstStyle xmlns:a="http://schemas.openxmlformats.org/drawingml/2006/main"/>
+          <a:p xmlns:a="http://schemas.openxmlformats.org/drawingml/2006/main"/>
+        </p:txBody>
+      </p:sp>
+      <p:sp>
+        <p:nvSpPr>
+          <p:cNvPr id="3" name="Notes Placeholder 2"/>
+          <p:cNvSpPr/>
+          <p:nvPr>
+            <p:ph type="body" idx="1"/>
+          </p:nvPr>
+        </p:nvSpPr>
+        <p:spPr/>
+        <p:txBody>
+          <a:bodyPr xmlns:a="http://schemas.openxmlformats.org/drawingml/2006/main"/>
+          <a:lstStyle xmlns:a="http://schemas.openxmlformats.org/drawingml/2006/main"/>
+          <a:p xmlns:a="http://schemas.openxmlformats.org/drawingml/2006/main">
+            <a:r>
+              <a:rPr lang="en-US"/>
+              <a:t>표지 — 인사. '안녕하세요, ABA3_최대석입니다. 선택한 산업은 금융이고, 1차 프로젝트로 반복 구매 고객의 추가 가입을 예측했습니다. 13분 동안 문제 정의부터 상담 운용안까지 소개하겠습니다.' (약 10초, 넘기면서 말한다)</a:t>
+            </a:r>
+          </a:p>
+        </p:txBody>
+      </p:sp>
+    </p:spTree>
+  </p:cSld>
+  <p:clrMapOvr>
+    <a:masterClrMapping xmlns:a="http://schemas.openxmlformats.org/drawingml/2006/main"/>
+  </p:clrMapOvr>
+</p:notes>
+</file>
+
+<file path=ppt/notesSlides/notesSlide18.xml><?xml version="1.0" encoding="utf-8"?>
+<p:notes xmlns:a="http://schemas.openxmlformats.org/drawingml/2006/main" xmlns:p="http://schemas.openxmlformats.org/presentationml/2006/main">
+  <p:cSld>
+    <p:spTree>
+      <p:nvGrpSpPr>
+        <p:cNvPr id="1" name=""/>
+        <p:cNvGrpSpPr/>
+        <p:nvPr/>
+      </p:nvGrpSpPr>
+      <p:grpSpPr>
+        <a:xfrm xmlns:a="http://schemas.openxmlformats.org/drawingml/2006/main"/>
+      </p:grpSpPr>
+      <p:sp>
+        <p:nvSpPr>
+          <p:cNvPr id="2" name="Slide Image Placeholder 1"/>
+          <p:cNvSpPr/>
+          <p:nvPr>
+            <p:ph type="sldImg" idx="0"/>
+          </p:nvPr>
+        </p:nvSpPr>
+        <p:spPr/>
+        <p:txBody>
+          <a:bodyPr xmlns:a="http://schemas.openxmlformats.org/drawingml/2006/main"/>
+          <a:lstStyle xmlns:a="http://schemas.openxmlformats.org/drawingml/2006/main"/>
+          <a:p xmlns:a="http://schemas.openxmlformats.org/drawingml/2006/main"/>
+        </p:txBody>
+      </p:sp>
+      <p:sp>
+        <p:nvSpPr>
+          <p:cNvPr id="3" name="Notes Placeholder 2"/>
+          <p:cNvSpPr/>
+          <p:nvPr>
+            <p:ph type="body" idx="1"/>
+          </p:nvPr>
+        </p:nvSpPr>
+        <p:spPr/>
+        <p:txBody>
+          <a:bodyPr xmlns:a="http://schemas.openxmlformats.org/drawingml/2006/main"/>
+          <a:lstStyle xmlns:a="http://schemas.openxmlformats.org/drawingml/2006/main"/>
+          <a:p xmlns:a="http://schemas.openxmlformats.org/drawingml/2006/main">
+            <a:r>
+              <a:rPr lang="en-US"/>
+              <a:t>산업·데이터·동기 — 선택한 산업은 금융(보험)이고, 데이터는 보험상품가입자의 보험유지 특성 분석 — 거래 385,019행 중 보험 거래 77,305건(고객 74,776명)을 사용해, 보장 보험만 보유한 38,932명을 분석 풀로 삼았다. 발표 동기는 일상의 권유전화: 받는 쪽도 성가시지만 거는 쪽도 근거가 없다 — 전원을 상담할 수 없으니 순서를 정해야 하고, 정답이 없으면 만들어 검증하면 된다. 검토 질문: 38,932명 중 누구를 먼저 만날 것인가. (약 40초)</a:t>
+            </a:r>
+          </a:p>
+        </p:txBody>
+      </p:sp>
+    </p:spTree>
+  </p:cSld>
+  <p:clrMapOvr>
+    <a:masterClrMapping xmlns:a="http://schemas.openxmlformats.org/drawingml/2006/main"/>
   </p:clrMapOvr>
 </p:notes>
 </file>
@@ -7407,6 +7519,1043 @@
 </p:sld>
 </file>
 
+<file path=ppt/slides/slide18.xml><?xml version="1.0" encoding="utf-8"?>
+<p:sld xmlns:a="http://schemas.openxmlformats.org/drawingml/2006/main" xmlns:p="http://schemas.openxmlformats.org/presentationml/2006/main">
+  <p:cSld>
+    <p:bg>
+      <p:bgPr>
+        <a:solidFill xmlns:a="http://schemas.openxmlformats.org/drawingml/2006/main">
+          <a:srgbClr val="1C1F26"/>
+        </a:solidFill>
+      </p:bgPr>
+    </p:bg>
+    <p:spTree>
+      <p:nvGrpSpPr>
+        <p:cNvPr id="1" name=""/>
+        <p:cNvGrpSpPr/>
+        <p:nvPr/>
+      </p:nvGrpSpPr>
+      <p:grpSpPr/>
+      <p:sp>
+        <p:nvSpPr>
+          <p:cNvPr id="100463" name="Band"/>
+          <p:cNvSpPr/>
+          <p:nvPr/>
+        </p:nvSpPr>
+        <p:spPr>
+          <a:xfrm>
+            <a:off x="0" y="0"/>
+            <a:ext cx="12193200" cy="90000"/>
+          </a:xfrm>
+          <a:prstGeom prst="rect">
+            <a:avLst/>
+          </a:prstGeom>
+          <a:solidFill>
+            <a:srgbClr val="7FB2E8"/>
+          </a:solidFill>
+          <a:ln>
+            <a:noFill/>
+          </a:ln>
+        </p:spPr>
+        <p:txBody>
+          <a:bodyPr/>
+          <a:lstStyle/>
+          <a:p/>
+        </p:txBody>
+      </p:sp>
+      <p:sp>
+        <p:nvSpPr>
+          <p:cNvPr id="100464" name="Kicker"/>
+          <p:cNvSpPr txBox="1"/>
+          <p:nvPr/>
+        </p:nvSpPr>
+        <p:spPr>
+          <a:xfrm>
+            <a:off x="457200" y="1404000"/>
+            <a:ext cx="11278800" cy="324000"/>
+          </a:xfrm>
+          <a:prstGeom prst="rect">
+            <a:avLst/>
+          </a:prstGeom>
+        </p:spPr>
+        <p:txBody>
+          <a:bodyPr/>
+          <a:lstStyle/>
+          <a:p>
+            <a:pPr algn="ctr"/>
+            <a:r>
+              <a:rPr lang="en-US" sz="1400">
+                <a:solidFill>
+                  <a:srgbClr val="A9B1D0"/>
+                </a:solidFill>
+                <a:latin typeface="Malgun Gothic"/>
+                <a:ea typeface="Malgun Gothic"/>
+              </a:rPr>
+              <a:t>1차 프로젝트 · 최종 발표</a:t>
+            </a:r>
+          </a:p>
+        </p:txBody>
+      </p:sp>
+      <p:sp>
+        <p:nvSpPr>
+          <p:cNvPr id="100465" name="CoverTitle"/>
+          <p:cNvSpPr txBox="1"/>
+          <p:nvPr/>
+        </p:nvSpPr>
+        <p:spPr>
+          <a:xfrm>
+            <a:off x="457200" y="1728000"/>
+            <a:ext cx="11278800" cy="1044000"/>
+          </a:xfrm>
+          <a:prstGeom prst="rect">
+            <a:avLst/>
+          </a:prstGeom>
+        </p:spPr>
+        <p:txBody>
+          <a:bodyPr/>
+          <a:lstStyle/>
+          <a:p>
+            <a:pPr algn="ctr"/>
+            <a:r>
+              <a:rPr lang="en-US" sz="4400" b="1">
+                <a:solidFill>
+                  <a:srgbClr val="F3F4F6"/>
+                </a:solidFill>
+                <a:latin typeface="Malgun Gothic"/>
+                <a:ea typeface="Malgun Gothic"/>
+              </a:rPr>
+              <a:t>보장only 프로젝트</a:t>
+            </a:r>
+          </a:p>
+        </p:txBody>
+      </p:sp>
+      <p:sp>
+        <p:nvSpPr>
+          <p:cNvPr id="100466" name="CoverSub"/>
+          <p:cNvSpPr txBox="1"/>
+          <p:nvPr/>
+        </p:nvSpPr>
+        <p:spPr>
+          <a:xfrm>
+            <a:off x="457200" y="2772000"/>
+            <a:ext cx="11278800" cy="540000"/>
+          </a:xfrm>
+          <a:prstGeom prst="rect">
+            <a:avLst/>
+          </a:prstGeom>
+        </p:spPr>
+        <p:txBody>
+          <a:bodyPr/>
+          <a:lstStyle/>
+          <a:p>
+            <a:pPr algn="ctr"/>
+            <a:r>
+              <a:rPr lang="en-US" sz="1900">
+                <a:solidFill>
+                  <a:srgbClr val="B9C2D0"/>
+                </a:solidFill>
+                <a:latin typeface="Malgun Gothic"/>
+                <a:ea typeface="Malgun Gothic"/>
+              </a:rPr>
+              <a:t>반복 구매 고객의 추가 가입을 예측합니다</a:t>
+            </a:r>
+          </a:p>
+        </p:txBody>
+      </p:sp>
+      <p:sp>
+        <p:nvSpPr>
+          <p:cNvPr id="100467" name="Divider"/>
+          <p:cNvSpPr/>
+          <p:nvPr/>
+        </p:nvSpPr>
+        <p:spPr>
+          <a:xfrm>
+            <a:off x="5018400" y="3564000"/>
+            <a:ext cx="2160000" cy="21600"/>
+          </a:xfrm>
+          <a:prstGeom prst="rect">
+            <a:avLst/>
+          </a:prstGeom>
+          <a:solidFill>
+            <a:srgbClr val="7FB2E8"/>
+          </a:solidFill>
+          <a:ln>
+            <a:noFill/>
+          </a:ln>
+        </p:spPr>
+        <p:txBody>
+          <a:bodyPr/>
+          <a:lstStyle/>
+          <a:p/>
+        </p:txBody>
+      </p:sp>
+      <p:sp>
+        <p:nvSpPr>
+          <p:cNvPr id="100468" name="CardA"/>
+          <p:cNvSpPr/>
+          <p:nvPr/>
+        </p:nvSpPr>
+        <p:spPr>
+          <a:xfrm>
+            <a:off x="2340000" y="3996000"/>
+            <a:ext cx="3528000" cy="1332000"/>
+          </a:xfrm>
+          <a:prstGeom prst="roundRect">
+            <a:avLst/>
+          </a:prstGeom>
+          <a:solidFill>
+            <a:srgbClr val="2B303D"/>
+          </a:solidFill>
+          <a:ln>
+            <a:noFill/>
+          </a:ln>
+        </p:spPr>
+        <p:txBody>
+          <a:bodyPr/>
+          <a:lstStyle/>
+          <a:p/>
+        </p:txBody>
+      </p:sp>
+      <p:sp>
+        <p:nvSpPr>
+          <p:cNvPr id="100469" name="CardAL"/>
+          <p:cNvSpPr txBox="1"/>
+          <p:nvPr/>
+        </p:nvSpPr>
+        <p:spPr>
+          <a:xfrm>
+            <a:off x="2484000" y="4212000"/>
+            <a:ext cx="3240000" cy="324000"/>
+          </a:xfrm>
+          <a:prstGeom prst="rect">
+            <a:avLst/>
+          </a:prstGeom>
+        </p:spPr>
+        <p:txBody>
+          <a:bodyPr/>
+          <a:lstStyle/>
+          <a:p>
+            <a:pPr algn="ctr"/>
+            <a:r>
+              <a:rPr lang="en-US" sz="1300">
+                <a:solidFill>
+                  <a:srgbClr val="A9B1D0"/>
+                </a:solidFill>
+                <a:latin typeface="Malgun Gothic"/>
+                <a:ea typeface="Malgun Gothic"/>
+              </a:rPr>
+              <a:t>선택한 산업</a:t>
+            </a:r>
+          </a:p>
+        </p:txBody>
+      </p:sp>
+      <p:sp>
+        <p:nvSpPr>
+          <p:cNvPr id="100470" name="CardAV"/>
+          <p:cNvSpPr txBox="1"/>
+          <p:nvPr/>
+        </p:nvSpPr>
+        <p:spPr>
+          <a:xfrm>
+            <a:off x="2484000" y="4500000"/>
+            <a:ext cx="3240000" cy="684000"/>
+          </a:xfrm>
+          <a:prstGeom prst="rect">
+            <a:avLst/>
+          </a:prstGeom>
+        </p:spPr>
+        <p:txBody>
+          <a:bodyPr/>
+          <a:lstStyle/>
+          <a:p>
+            <a:pPr algn="ctr"/>
+            <a:r>
+              <a:rPr lang="en-US" sz="2800" b="1">
+                <a:solidFill>
+                  <a:srgbClr val="7FB2E8"/>
+                </a:solidFill>
+                <a:latin typeface="Malgun Gothic"/>
+                <a:ea typeface="Malgun Gothic"/>
+              </a:rPr>
+              <a:t>금융</a:t>
+            </a:r>
+          </a:p>
+        </p:txBody>
+      </p:sp>
+      <p:sp>
+        <p:nvSpPr>
+          <p:cNvPr id="100471" name="CardB"/>
+          <p:cNvSpPr/>
+          <p:nvPr/>
+        </p:nvSpPr>
+        <p:spPr>
+          <a:xfrm>
+            <a:off x="6325200" y="3996000"/>
+            <a:ext cx="3528000" cy="1332000"/>
+          </a:xfrm>
+          <a:prstGeom prst="roundRect">
+            <a:avLst/>
+          </a:prstGeom>
+          <a:solidFill>
+            <a:srgbClr val="2B303D"/>
+          </a:solidFill>
+          <a:ln>
+            <a:noFill/>
+          </a:ln>
+        </p:spPr>
+        <p:txBody>
+          <a:bodyPr/>
+          <a:lstStyle/>
+          <a:p/>
+        </p:txBody>
+      </p:sp>
+      <p:sp>
+        <p:nvSpPr>
+          <p:cNvPr id="100472" name="CardBL"/>
+          <p:cNvSpPr txBox="1"/>
+          <p:nvPr/>
+        </p:nvSpPr>
+        <p:spPr>
+          <a:xfrm>
+            <a:off x="6469200" y="4212000"/>
+            <a:ext cx="3240000" cy="324000"/>
+          </a:xfrm>
+          <a:prstGeom prst="rect">
+            <a:avLst/>
+          </a:prstGeom>
+        </p:spPr>
+        <p:txBody>
+          <a:bodyPr/>
+          <a:lstStyle/>
+          <a:p>
+            <a:pPr algn="ctr"/>
+            <a:r>
+              <a:rPr lang="en-US" sz="1300">
+                <a:solidFill>
+                  <a:srgbClr val="A9B1D0"/>
+                </a:solidFill>
+                <a:latin typeface="Malgun Gothic"/>
+                <a:ea typeface="Malgun Gothic"/>
+              </a:rPr>
+              <a:t>이름</a:t>
+            </a:r>
+          </a:p>
+        </p:txBody>
+      </p:sp>
+      <p:sp>
+        <p:nvSpPr>
+          <p:cNvPr id="100473" name="CardBV"/>
+          <p:cNvSpPr txBox="1"/>
+          <p:nvPr/>
+        </p:nvSpPr>
+        <p:spPr>
+          <a:xfrm>
+            <a:off x="6469200" y="4500000"/>
+            <a:ext cx="3240000" cy="684000"/>
+          </a:xfrm>
+          <a:prstGeom prst="rect">
+            <a:avLst/>
+          </a:prstGeom>
+        </p:spPr>
+        <p:txBody>
+          <a:bodyPr/>
+          <a:lstStyle/>
+          <a:p>
+            <a:pPr algn="ctr"/>
+            <a:r>
+              <a:rPr lang="en-US" sz="2400" b="1">
+                <a:solidFill>
+                  <a:srgbClr val="E8B44C"/>
+                </a:solidFill>
+                <a:latin typeface="Malgun Gothic"/>
+                <a:ea typeface="Malgun Gothic"/>
+              </a:rPr>
+              <a:t>ABA3_최대석</a:t>
+            </a:r>
+          </a:p>
+        </p:txBody>
+      </p:sp>
+      <p:sp>
+        <p:nvSpPr>
+          <p:cNvPr id="100474" name="Date"/>
+          <p:cNvSpPr txBox="1"/>
+          <p:nvPr/>
+        </p:nvSpPr>
+        <p:spPr>
+          <a:xfrm>
+            <a:off x="457200" y="5796000"/>
+            <a:ext cx="11278800" cy="288000"/>
+          </a:xfrm>
+          <a:prstGeom prst="rect">
+            <a:avLst/>
+          </a:prstGeom>
+        </p:spPr>
+        <p:txBody>
+          <a:bodyPr/>
+          <a:lstStyle/>
+          <a:p>
+            <a:pPr algn="ctr"/>
+            <a:r>
+              <a:rPr lang="en-US" sz="1200">
+                <a:solidFill>
+                  <a:srgbClr val="8A93A6"/>
+                </a:solidFill>
+                <a:latin typeface="Malgun Gothic"/>
+                <a:ea typeface="Malgun Gothic"/>
+              </a:rPr>
+              <a:t>2026. 10. 27</a:t>
+            </a:r>
+          </a:p>
+        </p:txBody>
+      </p:sp>
+    </p:spTree>
+  </p:cSld>
+</p:sld>
+</file>
+
+<file path=ppt/slides/slide19.xml><?xml version="1.0" encoding="utf-8"?>
+<p:sld xmlns:a="http://schemas.openxmlformats.org/drawingml/2006/main" xmlns:p="http://schemas.openxmlformats.org/presentationml/2006/main">
+  <p:cSld>
+    <p:bg>
+      <p:bgPr>
+        <a:solidFill xmlns:a="http://schemas.openxmlformats.org/drawingml/2006/main">
+          <a:srgbClr val="1C1F26"/>
+        </a:solidFill>
+      </p:bgPr>
+    </p:bg>
+    <p:spTree>
+      <p:nvGrpSpPr>
+        <p:cNvPr id="1" name=""/>
+        <p:cNvGrpSpPr/>
+        <p:nvPr/>
+      </p:nvGrpSpPr>
+      <p:grpSpPr/>
+      <p:sp>
+        <p:nvSpPr>
+          <p:cNvPr id="100475" name="SecNum"/>
+          <p:cNvSpPr/>
+          <p:nvPr/>
+        </p:nvSpPr>
+        <p:spPr>
+          <a:xfrm xmlns:a="http://schemas.openxmlformats.org/drawingml/2006/main">
+            <a:off x="457200" y="457200"/>
+            <a:ext cx="684000" cy="684000"/>
+          </a:xfrm>
+          <a:prstGeom xmlns:a="http://schemas.openxmlformats.org/drawingml/2006/main" prst="ellipse">
+            <a:avLst/>
+          </a:prstGeom>
+          <a:solidFill xmlns:a="http://schemas.openxmlformats.org/drawingml/2006/main">
+            <a:srgbClr val="7FB2E8"/>
+          </a:solidFill>
+          <a:ln xmlns:a="http://schemas.openxmlformats.org/drawingml/2006/main">
+            <a:noFill/>
+          </a:ln>
+        </p:spPr>
+        <p:txBody>
+          <a:bodyPr xmlns:a="http://schemas.openxmlformats.org/drawingml/2006/main" anchor="ctr"/>
+          <a:lstStyle xmlns:a="http://schemas.openxmlformats.org/drawingml/2006/main"/>
+          <a:p xmlns:a="http://schemas.openxmlformats.org/drawingml/2006/main">
+            <a:pPr algn="ctr"/>
+            <a:r>
+              <a:rPr lang="en-US" sz="2200" b="1">
+                <a:solidFill>
+                  <a:srgbClr val="1C1F26"/>
+                </a:solidFill>
+                <a:latin typeface="Malgun Gothic"/>
+                <a:ea typeface="Malgun Gothic"/>
+              </a:rPr>
+              <a:t>1</a:t>
+            </a:r>
+          </a:p>
+        </p:txBody>
+      </p:sp>
+      <p:sp>
+        <p:nvSpPr>
+          <p:cNvPr id="100476" name="Kicker"/>
+          <p:cNvSpPr txBox="1"/>
+          <p:nvPr/>
+        </p:nvSpPr>
+        <p:spPr>
+          <a:xfrm xmlns:a="http://schemas.openxmlformats.org/drawingml/2006/main">
+            <a:off x="1296000" y="540000"/>
+            <a:ext cx="10080000" cy="324000"/>
+          </a:xfrm>
+          <a:prstGeom xmlns:a="http://schemas.openxmlformats.org/drawingml/2006/main" prst="rect">
+            <a:avLst/>
+          </a:prstGeom>
+        </p:spPr>
+        <p:txBody>
+          <a:bodyPr xmlns:a="http://schemas.openxmlformats.org/drawingml/2006/main"/>
+          <a:lstStyle xmlns:a="http://schemas.openxmlformats.org/drawingml/2006/main"/>
+          <a:p xmlns:a="http://schemas.openxmlformats.org/drawingml/2006/main">
+            <a:r>
+              <a:rPr lang="en-US" sz="1300">
+                <a:solidFill>
+                  <a:srgbClr val="A9B1D0"/>
+                </a:solidFill>
+                <a:latin typeface="Malgun Gothic"/>
+                <a:ea typeface="Malgun Gothic"/>
+              </a:rPr>
+              <a:t>1 · 산업과 데이터 · 발표 동기</a:t>
+            </a:r>
+          </a:p>
+        </p:txBody>
+      </p:sp>
+      <p:sp>
+        <p:nvSpPr>
+          <p:cNvPr id="100477" name="Title"/>
+          <p:cNvSpPr txBox="1"/>
+          <p:nvPr/>
+        </p:nvSpPr>
+        <p:spPr>
+          <a:xfrm xmlns:a="http://schemas.openxmlformats.org/drawingml/2006/main">
+            <a:off x="1278000" y="900000"/>
+            <a:ext cx="10080000" cy="540000"/>
+          </a:xfrm>
+          <a:prstGeom xmlns:a="http://schemas.openxmlformats.org/drawingml/2006/main" prst="rect">
+            <a:avLst/>
+          </a:prstGeom>
+        </p:spPr>
+        <p:txBody>
+          <a:bodyPr xmlns:a="http://schemas.openxmlformats.org/drawingml/2006/main"/>
+          <a:lstStyle xmlns:a="http://schemas.openxmlformats.org/drawingml/2006/main"/>
+          <a:p xmlns:a="http://schemas.openxmlformats.org/drawingml/2006/main">
+            <a:r>
+              <a:rPr lang="en-US" sz="2600" b="1">
+                <a:solidFill>
+                  <a:srgbClr val="F3F4F6"/>
+                </a:solidFill>
+                <a:latin typeface="Malgun Gothic"/>
+                <a:ea typeface="Malgun Gothic"/>
+              </a:rPr>
+              <a:t>선택한 산업과 데이터 — 왜 이 문제인가</a:t>
+            </a:r>
+          </a:p>
+        </p:txBody>
+      </p:sp>
+      <p:sp>
+        <p:nvSpPr>
+          <p:cNvPr id="100478" name="IndCard"/>
+          <p:cNvSpPr/>
+          <p:nvPr/>
+        </p:nvSpPr>
+        <p:spPr>
+          <a:xfrm xmlns:a="http://schemas.openxmlformats.org/drawingml/2006/main">
+            <a:off x="457200" y="1566000"/>
+            <a:ext cx="5544000" cy="1656000"/>
+          </a:xfrm>
+          <a:prstGeom xmlns:a="http://schemas.openxmlformats.org/drawingml/2006/main" prst="roundRect">
+            <a:avLst/>
+          </a:prstGeom>
+          <a:solidFill xmlns:a="http://schemas.openxmlformats.org/drawingml/2006/main">
+            <a:srgbClr val="2B303D"/>
+          </a:solidFill>
+          <a:ln xmlns:a="http://schemas.openxmlformats.org/drawingml/2006/main">
+            <a:noFill/>
+          </a:ln>
+        </p:spPr>
+        <p:txBody>
+          <a:bodyPr xmlns:a="http://schemas.openxmlformats.org/drawingml/2006/main"/>
+          <a:lstStyle xmlns:a="http://schemas.openxmlformats.org/drawingml/2006/main"/>
+          <a:p xmlns:a="http://schemas.openxmlformats.org/drawingml/2006/main"/>
+        </p:txBody>
+      </p:sp>
+      <p:sp>
+        <p:nvSpPr>
+          <p:cNvPr id="100479" name="IndL"/>
+          <p:cNvSpPr txBox="1"/>
+          <p:nvPr/>
+        </p:nvSpPr>
+        <p:spPr>
+          <a:xfrm xmlns:a="http://schemas.openxmlformats.org/drawingml/2006/main">
+            <a:off x="673200" y="1674000"/>
+            <a:ext cx="5112000" cy="306000"/>
+          </a:xfrm>
+          <a:prstGeom xmlns:a="http://schemas.openxmlformats.org/drawingml/2006/main" prst="rect">
+            <a:avLst/>
+          </a:prstGeom>
+        </p:spPr>
+        <p:txBody>
+          <a:bodyPr xmlns:a="http://schemas.openxmlformats.org/drawingml/2006/main"/>
+          <a:lstStyle xmlns:a="http://schemas.openxmlformats.org/drawingml/2006/main"/>
+          <a:p xmlns:a="http://schemas.openxmlformats.org/drawingml/2006/main">
+            <a:r>
+              <a:rPr lang="en-US" sz="1200">
+                <a:solidFill>
+                  <a:srgbClr val="A9B1D0"/>
+                </a:solidFill>
+                <a:latin typeface="Malgun Gothic"/>
+                <a:ea typeface="Malgun Gothic"/>
+              </a:rPr>
+              <a:t>선택한 산업</a:t>
+            </a:r>
+          </a:p>
+        </p:txBody>
+      </p:sp>
+      <p:sp>
+        <p:nvSpPr>
+          <p:cNvPr id="100480" name="IndV"/>
+          <p:cNvSpPr txBox="1"/>
+          <p:nvPr/>
+        </p:nvSpPr>
+        <p:spPr>
+          <a:xfrm xmlns:a="http://schemas.openxmlformats.org/drawingml/2006/main">
+            <a:off x="673200" y="1998000"/>
+            <a:ext cx="5112000" cy="504000"/>
+          </a:xfrm>
+          <a:prstGeom xmlns:a="http://schemas.openxmlformats.org/drawingml/2006/main" prst="rect">
+            <a:avLst/>
+          </a:prstGeom>
+        </p:spPr>
+        <p:txBody>
+          <a:bodyPr xmlns:a="http://schemas.openxmlformats.org/drawingml/2006/main"/>
+          <a:lstStyle xmlns:a="http://schemas.openxmlformats.org/drawingml/2006/main"/>
+          <a:p xmlns:a="http://schemas.openxmlformats.org/drawingml/2006/main">
+            <a:r>
+              <a:rPr lang="en-US" sz="2400" b="1">
+                <a:solidFill>
+                  <a:srgbClr val="7FB2E8"/>
+                </a:solidFill>
+                <a:latin typeface="Malgun Gothic"/>
+                <a:ea typeface="Malgun Gothic"/>
+              </a:rPr>
+              <a:t>금융 — 보험</a:t>
+            </a:r>
+          </a:p>
+        </p:txBody>
+      </p:sp>
+      <p:sp>
+        <p:nvSpPr>
+          <p:cNvPr id="100481" name="IndS"/>
+          <p:cNvSpPr txBox="1"/>
+          <p:nvPr/>
+        </p:nvSpPr>
+        <p:spPr>
+          <a:xfrm xmlns:a="http://schemas.openxmlformats.org/drawingml/2006/main">
+            <a:off x="673200" y="2520000"/>
+            <a:ext cx="5112000" cy="324000"/>
+          </a:xfrm>
+          <a:prstGeom xmlns:a="http://schemas.openxmlformats.org/drawingml/2006/main" prst="rect">
+            <a:avLst/>
+          </a:prstGeom>
+        </p:spPr>
+        <p:txBody>
+          <a:bodyPr xmlns:a="http://schemas.openxmlformats.org/drawingml/2006/main"/>
+          <a:lstStyle xmlns:a="http://schemas.openxmlformats.org/drawingml/2006/main"/>
+          <a:p xmlns:a="http://schemas.openxmlformats.org/drawingml/2006/main">
+            <a:r>
+              <a:rPr lang="en-US" sz="1350">
+                <a:solidFill>
+                  <a:srgbClr val="B9C2D0"/>
+                </a:solidFill>
+                <a:latin typeface="Malgun Gothic"/>
+                <a:ea typeface="Malgun Gothic"/>
+              </a:rPr>
+              <a:t>보험상품가입자의 보험유지 특성 분석 (보험계약 등)</a:t>
+            </a:r>
+          </a:p>
+        </p:txBody>
+      </p:sp>
+      <p:sp>
+        <p:nvSpPr>
+          <p:cNvPr id="100482" name="IndS2"/>
+          <p:cNvSpPr txBox="1"/>
+          <p:nvPr/>
+        </p:nvSpPr>
+        <p:spPr>
+          <a:xfrm xmlns:a="http://schemas.openxmlformats.org/drawingml/2006/main">
+            <a:off x="673200" y="2844000"/>
+            <a:ext cx="5112000" cy="324000"/>
+          </a:xfrm>
+          <a:prstGeom xmlns:a="http://schemas.openxmlformats.org/drawingml/2006/main" prst="rect">
+            <a:avLst/>
+          </a:prstGeom>
+        </p:spPr>
+        <p:txBody>
+          <a:bodyPr xmlns:a="http://schemas.openxmlformats.org/drawingml/2006/main"/>
+          <a:lstStyle xmlns:a="http://schemas.openxmlformats.org/drawingml/2006/main"/>
+          <a:p xmlns:a="http://schemas.openxmlformats.org/drawingml/2006/main">
+            <a:r>
+              <a:rPr lang="en-US" sz="1350">
+                <a:solidFill>
+                  <a:srgbClr val="B9C2D0"/>
+                </a:solidFill>
+                <a:latin typeface="Malgun Gothic"/>
+                <a:ea typeface="Malgun Gothic"/>
+              </a:rPr>
+              <a:t>TL_2.소비자.zip — 거래 385,019행 × 22열 (utf-8-sig)</a:t>
+            </a:r>
+          </a:p>
+        </p:txBody>
+      </p:sp>
+      <p:sp>
+        <p:nvSpPr>
+          <p:cNvPr id="100483" name="DataCard"/>
+          <p:cNvSpPr/>
+          <p:nvPr/>
+        </p:nvSpPr>
+        <p:spPr>
+          <a:xfrm xmlns:a="http://schemas.openxmlformats.org/drawingml/2006/main">
+            <a:off x="6192000" y="1566000"/>
+            <a:ext cx="5544000" cy="1656000"/>
+          </a:xfrm>
+          <a:prstGeom xmlns:a="http://schemas.openxmlformats.org/drawingml/2006/main" prst="roundRect">
+            <a:avLst/>
+          </a:prstGeom>
+          <a:solidFill xmlns:a="http://schemas.openxmlformats.org/drawingml/2006/main">
+            <a:srgbClr val="2B303D"/>
+          </a:solidFill>
+          <a:ln xmlns:a="http://schemas.openxmlformats.org/drawingml/2006/main">
+            <a:noFill/>
+          </a:ln>
+        </p:spPr>
+        <p:txBody>
+          <a:bodyPr xmlns:a="http://schemas.openxmlformats.org/drawingml/2006/main"/>
+          <a:lstStyle xmlns:a="http://schemas.openxmlformats.org/drawingml/2006/main"/>
+          <a:p xmlns:a="http://schemas.openxmlformats.org/drawingml/2006/main"/>
+        </p:txBody>
+      </p:sp>
+      <p:sp>
+        <p:nvSpPr>
+          <p:cNvPr id="100484" name="DataL"/>
+          <p:cNvSpPr txBox="1"/>
+          <p:nvPr/>
+        </p:nvSpPr>
+        <p:spPr>
+          <a:xfrm xmlns:a="http://schemas.openxmlformats.org/drawingml/2006/main">
+            <a:off x="6408000" y="1674000"/>
+            <a:ext cx="5112000" cy="306000"/>
+          </a:xfrm>
+          <a:prstGeom xmlns:a="http://schemas.openxmlformats.org/drawingml/2006/main" prst="rect">
+            <a:avLst/>
+          </a:prstGeom>
+        </p:spPr>
+        <p:txBody>
+          <a:bodyPr xmlns:a="http://schemas.openxmlformats.org/drawingml/2006/main"/>
+          <a:lstStyle xmlns:a="http://schemas.openxmlformats.org/drawingml/2006/main"/>
+          <a:p xmlns:a="http://schemas.openxmlformats.org/drawingml/2006/main">
+            <a:r>
+              <a:rPr lang="en-US" sz="1200">
+                <a:solidFill>
+                  <a:srgbClr val="A9B1D0"/>
+                </a:solidFill>
+                <a:latin typeface="Malgun Gothic"/>
+                <a:ea typeface="Malgun Gothic"/>
+              </a:rPr>
+              <a:t>사용한 데이터</a:t>
+            </a:r>
+          </a:p>
+        </p:txBody>
+      </p:sp>
+      <p:sp>
+        <p:nvSpPr>
+          <p:cNvPr id="100485" name="DataV"/>
+          <p:cNvSpPr txBox="1"/>
+          <p:nvPr/>
+        </p:nvSpPr>
+        <p:spPr>
+          <a:xfrm xmlns:a="http://schemas.openxmlformats.org/drawingml/2006/main">
+            <a:off x="6408000" y="1998000"/>
+            <a:ext cx="5112000" cy="468000"/>
+          </a:xfrm>
+          <a:prstGeom xmlns:a="http://schemas.openxmlformats.org/drawingml/2006/main" prst="rect">
+            <a:avLst/>
+          </a:prstGeom>
+        </p:spPr>
+        <p:txBody>
+          <a:bodyPr xmlns:a="http://schemas.openxmlformats.org/drawingml/2006/main"/>
+          <a:lstStyle xmlns:a="http://schemas.openxmlformats.org/drawingml/2006/main"/>
+          <a:p xmlns:a="http://schemas.openxmlformats.org/drawingml/2006/main">
+            <a:r>
+              <a:rPr lang="en-US" sz="2000" b="1">
+                <a:solidFill>
+                  <a:srgbClr val="7FB2E8"/>
+                </a:solidFill>
+                <a:latin typeface="Malgun Gothic"/>
+                <a:ea typeface="Malgun Gothic"/>
+              </a:rPr>
+              <a:t>보험 거래 77,305건 — 고객 74,776명</a:t>
+            </a:r>
+          </a:p>
+        </p:txBody>
+      </p:sp>
+      <p:sp>
+        <p:nvSpPr>
+          <p:cNvPr id="100486" name="DataS1"/>
+          <p:cNvSpPr txBox="1"/>
+          <p:nvPr/>
+        </p:nvSpPr>
+        <p:spPr>
+          <a:xfrm xmlns:a="http://schemas.openxmlformats.org/drawingml/2006/main">
+            <a:off x="6408000" y="2502000"/>
+            <a:ext cx="5112000" cy="324000"/>
+          </a:xfrm>
+          <a:prstGeom xmlns:a="http://schemas.openxmlformats.org/drawingml/2006/main" prst="rect">
+            <a:avLst/>
+          </a:prstGeom>
+        </p:spPr>
+        <p:txBody>
+          <a:bodyPr xmlns:a="http://schemas.openxmlformats.org/drawingml/2006/main"/>
+          <a:lstStyle xmlns:a="http://schemas.openxmlformats.org/drawingml/2006/main"/>
+          <a:p xmlns:a="http://schemas.openxmlformats.org/drawingml/2006/main">
+            <a:r>
+              <a:rPr lang="en-US" sz="1350">
+                <a:solidFill>
+                  <a:srgbClr val="B9C2D0"/>
+                </a:solidFill>
+                <a:latin typeface="Malgun Gothic"/>
+                <a:ea typeface="Malgun Gothic"/>
+              </a:rPr>
+              <a:t>분석 풀 — 보장 보험만 보유한 38,932명 (2024년 말)</a:t>
+            </a:r>
+          </a:p>
+        </p:txBody>
+      </p:sp>
+      <p:sp>
+        <p:nvSpPr>
+          <p:cNvPr id="100487" name="DataS2"/>
+          <p:cNvSpPr txBox="1"/>
+          <p:nvPr/>
+        </p:nvSpPr>
+        <p:spPr>
+          <a:xfrm xmlns:a="http://schemas.openxmlformats.org/drawingml/2006/main">
+            <a:off x="6408000" y="2826000"/>
+            <a:ext cx="5112000" cy="324000"/>
+          </a:xfrm>
+          <a:prstGeom xmlns:a="http://schemas.openxmlformats.org/drawingml/2006/main" prst="rect">
+            <a:avLst/>
+          </a:prstGeom>
+        </p:spPr>
+        <p:txBody>
+          <a:bodyPr xmlns:a="http://schemas.openxmlformats.org/drawingml/2006/main"/>
+          <a:lstStyle xmlns:a="http://schemas.openxmlformats.org/drawingml/2006/main"/>
+          <a:p xmlns:a="http://schemas.openxmlformats.org/drawingml/2006/main">
+            <a:r>
+              <a:rPr lang="en-US" sz="1350">
+                <a:solidFill>
+                  <a:srgbClr val="B9C2D0"/>
+                </a:solidFill>
+                <a:latin typeface="Malgun Gothic"/>
+                <a:ea typeface="Malgun Gothic"/>
+              </a:rPr>
+              <a:t>정답 열 없음 → 가입 연도를 뒤집어 정답 직접 생성</a:t>
+            </a:r>
+          </a:p>
+        </p:txBody>
+      </p:sp>
+      <p:sp>
+        <p:nvSpPr>
+          <p:cNvPr id="100488" name="MotiveBox"/>
+          <p:cNvSpPr/>
+          <p:nvPr/>
+        </p:nvSpPr>
+        <p:spPr>
+          <a:xfrm xmlns:a="http://schemas.openxmlformats.org/drawingml/2006/main">
+            <a:off x="457200" y="3420000"/>
+            <a:ext cx="11278800" cy="1476000"/>
+          </a:xfrm>
+          <a:prstGeom xmlns:a="http://schemas.openxmlformats.org/drawingml/2006/main" prst="roundRect">
+            <a:avLst/>
+          </a:prstGeom>
+          <a:solidFill xmlns:a="http://schemas.openxmlformats.org/drawingml/2006/main">
+            <a:srgbClr val="1E222B"/>
+          </a:solidFill>
+          <a:ln xmlns:a="http://schemas.openxmlformats.org/drawingml/2006/main" w="19050">
+            <a:solidFill>
+              <a:srgbClr val="7FB2E8"/>
+            </a:solidFill>
+          </a:ln>
+        </p:spPr>
+        <p:txBody>
+          <a:bodyPr xmlns:a="http://schemas.openxmlformats.org/drawingml/2006/main"/>
+          <a:lstStyle xmlns:a="http://schemas.openxmlformats.org/drawingml/2006/main"/>
+          <a:p xmlns:a="http://schemas.openxmlformats.org/drawingml/2006/main"/>
+        </p:txBody>
+      </p:sp>
+      <p:sp>
+        <p:nvSpPr>
+          <p:cNvPr id="100489" name="MotiveL"/>
+          <p:cNvSpPr txBox="1"/>
+          <p:nvPr/>
+        </p:nvSpPr>
+        <p:spPr>
+          <a:xfrm xmlns:a="http://schemas.openxmlformats.org/drawingml/2006/main">
+            <a:off x="684000" y="3546000"/>
+            <a:ext cx="1800000" cy="306000"/>
+          </a:xfrm>
+          <a:prstGeom xmlns:a="http://schemas.openxmlformats.org/drawingml/2006/main" prst="rect">
+            <a:avLst/>
+          </a:prstGeom>
+        </p:spPr>
+        <p:txBody>
+          <a:bodyPr xmlns:a="http://schemas.openxmlformats.org/drawingml/2006/main"/>
+          <a:lstStyle xmlns:a="http://schemas.openxmlformats.org/drawingml/2006/main"/>
+          <a:p xmlns:a="http://schemas.openxmlformats.org/drawingml/2006/main">
+            <a:r>
+              <a:rPr lang="en-US" sz="1200" b="1">
+                <a:solidFill>
+                  <a:srgbClr val="7FB2E8"/>
+                </a:solidFill>
+                <a:latin typeface="Malgun Gothic"/>
+                <a:ea typeface="Malgun Gothic"/>
+              </a:rPr>
+              <a:t>발표 동기</a:t>
+            </a:r>
+          </a:p>
+        </p:txBody>
+      </p:sp>
+      <p:sp>
+        <p:nvSpPr>
+          <p:cNvPr id="100490" name="MotiveT"/>
+          <p:cNvSpPr txBox="1"/>
+          <p:nvPr/>
+        </p:nvSpPr>
+        <p:spPr>
+          <a:xfrm xmlns:a="http://schemas.openxmlformats.org/drawingml/2006/main">
+            <a:off x="684000" y="3870000"/>
+            <a:ext cx="10836000" cy="972000"/>
+          </a:xfrm>
+          <a:prstGeom xmlns:a="http://schemas.openxmlformats.org/drawingml/2006/main" prst="rect">
+            <a:avLst/>
+          </a:prstGeom>
+        </p:spPr>
+        <p:txBody>
+          <a:bodyPr xmlns:a="http://schemas.openxmlformats.org/drawingml/2006/main"/>
+          <a:lstStyle xmlns:a="http://schemas.openxmlformats.org/drawingml/2006/main"/>
+          <a:p>
+            <a:r>
+              <a:rPr lang="en-US" sz="1600">
+                <a:solidFill>
+                  <a:srgbClr val="F3F4F6"/>
+                </a:solidFill>
+                <a:latin typeface="Malgun Gothic"/>
+                <a:ea typeface="Malgun Gothic"/>
+              </a:rPr>
+              <a:t>출발점 — 또 걸려온 상담 권유전화. 받는 쪽도, 거는 쪽도 근거가 없습니다.</a:t>
+            </a:r>
+          </a:p>
+          <a:p>
+            <a:r>
+              <a:rPr lang="en-US" sz="1600">
+                <a:solidFill>
+                  <a:srgbClr val="F3F4F6"/>
+                </a:solidFill>
+                <a:latin typeface="Malgun Gothic"/>
+                <a:ea typeface="Malgun Gothic"/>
+              </a:rPr>
+              <a:t>38,932명 전원 상담은 불가능 — '누구를 먼저 만날지'를 정해야 합니다.</a:t>
+            </a:r>
+          </a:p>
+          <a:p>
+            <a:r>
+              <a:rPr lang="en-US" sz="1600">
+                <a:solidFill>
+                  <a:srgbClr val="F3F4F6"/>
+                </a:solidFill>
+                <a:latin typeface="Malgun Gothic"/>
+                <a:ea typeface="Malgun Gothic"/>
+              </a:rPr>
+              <a:t>정답이 없다면 정답을 만들어 검증한다 — 이 발표는 그 기록입니다.</a:t>
+            </a:r>
+          </a:p>
+        </p:txBody>
+      </p:sp>
+      <p:sp>
+        <p:nvSpPr>
+          <p:cNvPr id="100491" name="QBox"/>
+          <p:cNvSpPr/>
+          <p:nvPr/>
+        </p:nvSpPr>
+        <p:spPr>
+          <a:xfrm xmlns:a="http://schemas.openxmlformats.org/drawingml/2006/main">
+            <a:off x="457200" y="5040000"/>
+            <a:ext cx="11278800" cy="864000"/>
+          </a:xfrm>
+          <a:prstGeom xmlns:a="http://schemas.openxmlformats.org/drawingml/2006/main" prst="roundRect">
+            <a:avLst/>
+          </a:prstGeom>
+          <a:solidFill xmlns:a="http://schemas.openxmlformats.org/drawingml/2006/main">
+            <a:srgbClr val="1E3A2C"/>
+          </a:solidFill>
+          <a:ln xmlns:a="http://schemas.openxmlformats.org/drawingml/2006/main">
+            <a:noFill/>
+          </a:ln>
+        </p:spPr>
+        <p:txBody>
+          <a:bodyPr xmlns:a="http://schemas.openxmlformats.org/drawingml/2006/main"/>
+          <a:lstStyle xmlns:a="http://schemas.openxmlformats.org/drawingml/2006/main"/>
+          <a:p xmlns:a="http://schemas.openxmlformats.org/drawingml/2006/main"/>
+        </p:txBody>
+      </p:sp>
+      <p:sp>
+        <p:nvSpPr>
+          <p:cNvPr id="100492" name="QL"/>
+          <p:cNvSpPr txBox="1"/>
+          <p:nvPr/>
+        </p:nvSpPr>
+        <p:spPr>
+          <a:xfrm xmlns:a="http://schemas.openxmlformats.org/drawingml/2006/main">
+            <a:off x="684000" y="5148000"/>
+            <a:ext cx="1800000" cy="306000"/>
+          </a:xfrm>
+          <a:prstGeom xmlns:a="http://schemas.openxmlformats.org/drawingml/2006/main" prst="rect">
+            <a:avLst/>
+          </a:prstGeom>
+        </p:spPr>
+        <p:txBody>
+          <a:bodyPr xmlns:a="http://schemas.openxmlformats.org/drawingml/2006/main"/>
+          <a:lstStyle xmlns:a="http://schemas.openxmlformats.org/drawingml/2006/main"/>
+          <a:p xmlns:a="http://schemas.openxmlformats.org/drawingml/2006/main">
+            <a:r>
+              <a:rPr lang="en-US" sz="1200" b="1">
+                <a:solidFill>
+                  <a:srgbClr val="5EC98A"/>
+                </a:solidFill>
+                <a:latin typeface="Malgun Gothic"/>
+                <a:ea typeface="Malgun Gothic"/>
+              </a:rPr>
+              <a:t>검토 질문</a:t>
+            </a:r>
+          </a:p>
+        </p:txBody>
+      </p:sp>
+      <p:sp>
+        <p:nvSpPr>
+          <p:cNvPr id="100493" name="QT"/>
+          <p:cNvSpPr txBox="1"/>
+          <p:nvPr/>
+        </p:nvSpPr>
+        <p:spPr>
+          <a:xfrm xmlns:a="http://schemas.openxmlformats.org/drawingml/2006/main">
+            <a:off x="684000" y="5472000"/>
+            <a:ext cx="10836000" cy="396000"/>
+          </a:xfrm>
+          <a:prstGeom xmlns:a="http://schemas.openxmlformats.org/drawingml/2006/main" prst="rect">
+            <a:avLst/>
+          </a:prstGeom>
+        </p:spPr>
+        <p:txBody>
+          <a:bodyPr xmlns:a="http://schemas.openxmlformats.org/drawingml/2006/main"/>
+          <a:lstStyle xmlns:a="http://schemas.openxmlformats.org/drawingml/2006/main"/>
+          <a:p xmlns:a="http://schemas.openxmlformats.org/drawingml/2006/main">
+            <a:r>
+              <a:rPr lang="en-US" sz="1550" b="1">
+                <a:solidFill>
+                  <a:srgbClr val="F3F4F6"/>
+                </a:solidFill>
+                <a:latin typeface="Malgun Gothic"/>
+                <a:ea typeface="Malgun Gothic"/>
+              </a:rPr>
+              <a:t>보장 보험만 가진 고객 38,932명 중, 누구에게 먼저 추가 가입을 제안해야 상담 자원을 가장 잘 쓸 수 있는가?</a:t>
+            </a:r>
+          </a:p>
+        </p:txBody>
+      </p:sp>
+    </p:spTree>
+  </p:cSld>
+</p:sld>
+</file>
+
 <file path=ppt/slides/slide2.xml><?xml version="1.0" encoding="utf-8"?>
 <p:sld xmlns:a="http://schemas.openxmlformats.org/drawingml/2006/main" xmlns:r="http://schemas.openxmlformats.org/officeDocument/2006/relationships" xmlns:p="http://schemas.openxmlformats.org/presentationml/2006/main">
   <p:cSld>
@@ -10283,7 +11432,7 @@
 </file>
 
 <file path=ppt/slides/slide6.xml><?xml version="1.0" encoding="utf-8"?>
-<p:sld xmlns:a="http://schemas.openxmlformats.org/drawingml/2006/main" xmlns:r="http://schemas.openxmlformats.org/officeDocument/2006/relationships" xmlns:p="http://schemas.openxmlformats.org/presentationml/2006/main">
+<p:sld xmlns:c="http://schemas.openxmlformats.org/drawingml/2006/chart" xmlns:a="http://schemas.openxmlformats.org/drawingml/2006/main" xmlns:r="http://schemas.openxmlformats.org/officeDocument/2006/relationships" xmlns:p="http://schemas.openxmlformats.org/presentationml/2006/main">
   <p:cSld>
     <p:bg>
       <p:bgPr>
@@ -10541,7 +11690,7 @@
 </file>
 
 <file path=ppt/slides/slide7.xml><?xml version="1.0" encoding="utf-8"?>
-<p:sld xmlns:a="http://schemas.openxmlformats.org/drawingml/2006/main" xmlns:r="http://schemas.openxmlformats.org/officeDocument/2006/relationships" xmlns:p="http://schemas.openxmlformats.org/presentationml/2006/main">
+<p:sld xmlns:c="http://schemas.openxmlformats.org/drawingml/2006/chart" xmlns:a="http://schemas.openxmlformats.org/drawingml/2006/main" xmlns:r="http://schemas.openxmlformats.org/officeDocument/2006/relationships" xmlns:p="http://schemas.openxmlformats.org/presentationml/2006/main">
   <p:cSld>
     <p:bg>
       <p:bgPr>
@@ -12189,7 +13338,7 @@
 </file>
 
 <file path=ppt/slides/slide9.xml><?xml version="1.0" encoding="utf-8"?>
-<p:sld xmlns:a="http://schemas.openxmlformats.org/drawingml/2006/main" xmlns:r="http://schemas.openxmlformats.org/officeDocument/2006/relationships" xmlns:p="http://schemas.openxmlformats.org/presentationml/2006/main">
+<p:sld xmlns:c="http://schemas.openxmlformats.org/drawingml/2006/chart" xmlns:a="http://schemas.openxmlformats.org/drawingml/2006/main" xmlns:r="http://schemas.openxmlformats.org/officeDocument/2006/relationships" xmlns:p="http://schemas.openxmlformats.org/presentationml/2006/main">
   <p:cSld>
     <p:bg>
       <p:bgPr>

--- a/artifacts/프로젝트1_최종발표자료.pptx
+++ b/artifacts/프로젝트1_최종발표자료.pptx
@@ -1924,7 +1924,7 @@
           <a:p>
             <a:r>
               <a:rPr lang="en-US"/>
-              <a:t>한 문장: 신호가 겹치는 고객을 먼저 만난다. 숫자 3개: 0.720, 8.2%(2.8배), 82명(+53명). 한계를 인정해도 합의된 기준 안에서 결론 유효. 매월 1일 갱신. 앵커: 0.720 · 8.2% · 82명.</a:t>
+              <a:t>한 문장: 신호가 겹치는 고객을 먼저 만난다. 숫자 3개: 0.720, 8.2%(2.8배), 82명(+53명). 한계는 있지만 시작 전에 인정했고, 판정 기준도 미리 정했기에 지금 상황에서 쓸 만한 근거. 매월 1일 갱신. 앵커: 0.720 · 8.2% · 82명.</a:t>
             </a:r>
           </a:p>
         </p:txBody>
@@ -2628,7 +2628,7 @@
           <a:p>
             <a:r>
               <a:rPr lang="en-US"/>
-              <a:t>핵심 반박 대응 슬라이드 — 'RF가 9.8%로 더 높은데 왜 8.2% 로지스틱?' ① 같은 조건 20회 승부 13승 7패, 평균 +0.10%p±0.60 — 동전 던지면 뒤집히는 차이. ② RF는 설정에 흔들린다: 12가지 튜닝 → 8.3%로 오히려 하락(9.8%는 상한), 과하게 자란 트리는 AUC 0.65대 급락(과적합). ③ 로지스틱은 계수로 '이 고객 왜?'에 답 — 특약 +0.84 1등, RF 중요도 1위도 특약(같은 신호). 운용안 티어 수치 변동 없음. 결론: 이기지도 지지도 않는 차이라면, 현장에서 이유를 설명할 수 있는 모델이 이깁니다.</a:t>
+              <a:t>핵심 반박 대응 — 'RF가 9.8% 더 높은데 왜 8.2%를 골랐나?' ① 차이가 운 범위: 같은 조건 20회 승부에서 13승 7패, 평균 차이 +0.10%p±0.60 — 동전 던지면 뒤집히는 크기. ② RF는 설정에 흔들린다: 12가지 튜닝하면 오히려 8.3%로 하락(9.8%는 상한일 뿐), 과하게 자란 트리는 급락. ③ 로지스틱은 이유를 말한다: '왜 1순위?'에 '특약 보유라서'라고 답할 수 있음 — RF도 특약을 1등으로 뽑아 같은 신호. 운용안 티어 변동 없음.</a:t>
             </a:r>
           </a:p>
         </p:txBody>
@@ -2694,7 +2694,7 @@
           <a:p>
             <a:r>
               <a:rPr lang="en-US"/>
-              <a:t>믿음 확인 3가지. ① 계단 일치(오른쪽): 모델이 매긴 확률 등급과 실제 가입률이 Q1 2.30% → Q5 3.66%로 꺾임 없이 일치 — 확률이 거짓말 안 하므로 티어 수치를 '십 명 중 한 명 이력'식 실제 빈도로 말할 수 있다. ② 소거 실험: 특약을 빼면 상위 1,000명 8.15% → 7.24%로 떨어져 진짜 중요함이 확인(계수 1위 = 기여 1위). ③ 재실행 검증 PASS(2026-10-18): AUC 0.72±0.01, 상위 1,000명 8.19% 재현. 왼쪽 계수 그래프는 모델이 중요하다고 본 항목 — 특약 +0.84 1등, 60대 −1.42 반대 방향.</a:t>
+              <a:t>믿음 확인 3가지. ① 계단 일치(오른쪽): 모델이 매긴 등급과 실제 가입률이 Q1 2.30% → Q5 3.66%로 순서대로 일치 — 확률이 거짓말 안 하므로 티어 수치를 실제 빈도처럼 말할 수 있음. ② 말한 것을 시험: '특약이 중요하다'고 말했는데 실제로 빼보니 8.15% → 7.24%로 뚝 떨어짐 — 말한 대로 진짜 중요. ③ 같은 작업 재실행: 성적 그대로 재현(PASS, 2026-10-18) — 운이 아니라 다시 나오는 결과. 왼쪽 그래프는 모델이 중요하다고 본 항목 — 특약이 1등.</a:t>
             </a:r>
           </a:p>
         </p:txBody>

--- a/artifacts/프로젝트1_최종발표자료.pptx
+++ b/artifacts/프로젝트1_최종발표자료.pptx
@@ -12833,7 +12833,7 @@
 </file>
 
 <file path=ppt/slides/slide8.xml><?xml version="1.0" encoding="utf-8"?>
-<p:sld xmlns:a="http://schemas.openxmlformats.org/drawingml/2006/main" xmlns:r="http://schemas.openxmlformats.org/officeDocument/2006/relationships" xmlns:p="http://schemas.openxmlformats.org/presentationml/2006/main">
+<p:sld xmlns:c="http://schemas.openxmlformats.org/drawingml/2006/chart" xmlns:a="http://schemas.openxmlformats.org/drawingml/2006/main" xmlns:r="http://schemas.openxmlformats.org/officeDocument/2006/relationships" xmlns:p="http://schemas.openxmlformats.org/presentationml/2006/main">
   <p:cSld>
     <p:bg>
       <p:bgPr>
@@ -12984,8 +12984,8 @@
         </p:nvSpPr>
         <p:spPr>
           <a:xfrm>
-            <a:off x="457200" y="5400000"/>
-            <a:ext cx="11278800" cy="360000"/>
+            <a:off x="457200" y="5328000"/>
+            <a:ext cx="11278800" cy="324000"/>
           </a:xfrm>
           <a:prstGeom prst="rect">
             <a:avLst/>
@@ -13017,8 +13017,8 @@
         </p:nvSpPr>
         <p:spPr>
           <a:xfrm>
-            <a:off x="457200" y="5832000"/>
-            <a:ext cx="11278800" cy="432000"/>
+            <a:off x="457200" y="5706000"/>
+            <a:ext cx="11278800" cy="396000"/>
           </a:xfrm>
           <a:prstGeom prst="rect">
             <a:avLst/>
@@ -13050,8 +13050,8 @@
         </p:nvSpPr>
         <p:spPr>
           <a:xfrm>
-            <a:off x="457200" y="6336000"/>
-            <a:ext cx="11278800" cy="324000"/>
+            <a:off x="457200" y="6156000"/>
+            <a:ext cx="11278800" cy="306000"/>
           </a:xfrm>
           <a:prstGeom prst="rect">
             <a:avLst/>
@@ -13071,6 +13071,38 @@
                 <a:ea typeface="Malgun Gothic"/>
               </a:rPr>
               <a:t>버려진 신호 — 갱신형 · 경과 기간 · 병력 · 결혼 단독 · 보유수×납입액</a:t>
+            </a:r>
+          </a:p>
+        </p:txBody>
+      </p:sp>
+      <p:sp>
+        <p:nvSpPr>
+          <p:cNvPr id="100494" name="Map"/>
+          <p:cNvSpPr txBox="1"/>
+          <p:nvPr/>
+        </p:nvSpPr>
+        <p:spPr>
+          <a:xfrm>
+            <a:off x="457200" y="6516000"/>
+            <a:ext cx="11278800" cy="306000"/>
+          </a:xfrm>
+          <a:prstGeom prst="rect">
+            <a:avLst/>
+          </a:prstGeom>
+        </p:spPr>
+        <p:txBody>
+          <a:bodyPr lIns="18000" tIns="18000" rIns="18000" bIns="18000" anchor="ctr"/>
+          <a:lstStyle/>
+          <a:p>
+            <a:r>
+              <a:rPr lang="en-US" sz="1200" b="1">
+                <a:solidFill>
+                  <a:srgbClr val="E8B44C"/>
+                </a:solidFill>
+                <a:latin typeface="Malgun Gothic"/>
+                <a:ea typeface="Malgun Gothic"/>
+              </a:rPr>
+              <a:t>신호→운용 — 보유수=티어 1순위 · 특약=대화 거리 · 기혼·중년=교차 피처 · 소득=재배치 · 지역=후순위 · 신용=하단 걸러내기</a:t>
             </a:r>
           </a:p>
         </p:txBody>
@@ -13091,7 +13123,7 @@
 </file>
 
 <file path=ppt/slides/slide9.xml><?xml version="1.0" encoding="utf-8"?>
-<p:sld xmlns:a="http://schemas.openxmlformats.org/drawingml/2006/main" xmlns:r="http://schemas.openxmlformats.org/officeDocument/2006/relationships" xmlns:p="http://schemas.openxmlformats.org/presentationml/2006/main">
+<p:sld xmlns:c="http://schemas.openxmlformats.org/drawingml/2006/chart" xmlns:a="http://schemas.openxmlformats.org/drawingml/2006/main" xmlns:r="http://schemas.openxmlformats.org/officeDocument/2006/relationships" xmlns:p="http://schemas.openxmlformats.org/presentationml/2006/main">
   <p:cSld>
     <p:bg>
       <p:bgPr>
